--- a/cursos/recursos/aperturas-y-defensas/07-defensa-india-de-rey.pptx
+++ b/cursos/recursos/aperturas-y-defensas/07-defensa-india-de-rey.pptx
@@ -1602,7 +1602,7 @@
                 <a:ea typeface="Calibri" pitchFamily="34" charset="-122"/>
                 <a:cs typeface="Calibri" pitchFamily="34" charset="-120"/>
               </a:rPr>
-              <a:t>1.d4 Nf6 2.c4 g6 3.Nc3 Bg7 4.e4 d6: negras cede el centro completo a cambio de atacarlo más adelante con ...e5 o ...c5, y prepara un ataque directo al rey blanco con ...f5 en muchas líneas.</a:t>
+              <a:t>1.d4 Cf6 2.c4 g6 3.Cc3 Ag7 4.e4 d6: negras cede el centro completo a cambio de atacarlo más adelante con ...e5 o ...c5, y prepara un ataque directo al rey blanco con ...f5 en muchas líneas.</a:t>
             </a:r>
             <a:endParaRPr lang="en-US" sz="1600" dirty="0"/>
           </a:p>
